--- a/colleges/kmtc/diploma/Diploma in Kenya Registered Community Health Nursing/Year 3/Communicable & Vector-borne Diseases/01_Foundations_and_Epidemiology/B. COMMUNICABLE DISEASES - PREVENTION AND CONTROL.pptx
+++ b/colleges/kmtc/diploma/Diploma in Kenya Registered Community Health Nursing/Year 3/Communicable & Vector-borne Diseases/01_Foundations_and_Epidemiology/B. COMMUNICABLE DISEASES - PREVENTION AND CONTROL.pptx
@@ -8134,39 +8134,6 @@
           <a:chExt cx="0" cy="0"/>
         </a:xfrm>
       </p:grpSpPr>
-      <p:sp>
-        <p:nvSpPr>
-          <p:cNvPr id="3" name="Content Placeholder 2"/>
-          <p:cNvSpPr>
-            <a:spLocks noGrp="1"/>
-          </p:cNvSpPr>
-          <p:nvPr>
-            <p:ph idx="1"/>
-          </p:nvPr>
-        </p:nvSpPr>
-        <p:spPr>
-          <a:xfrm>
-            <a:off x="685800" y="3429000"/>
-            <a:ext cx="8229600" cy="2773363"/>
-          </a:xfrm>
-        </p:spPr>
-        <p:txBody>
-          <a:bodyPr>
-            <a:normAutofit/>
-          </a:bodyPr>
-          <a:lstStyle/>
-          <a:p>
-            <a:pPr algn="ctr">
-              <a:buNone/>
-            </a:pPr>
-            <a:endParaRPr lang="en-US" sz="3600" b="1" dirty="0" smtClean="0">
-              <a:solidFill>
-                <a:srgbClr val="5A1CF6"/>
-              </a:solidFill>
-            </a:endParaRPr>
-          </a:p>
-        </p:txBody>
-      </p:sp>
       <p:sp>
         <p:nvSpPr>
           <p:cNvPr id="2" name="Title 1"/>
